--- a/dist/weeks-포트폴리오제작/포트폴리오제작_06주차_콘텐츠구조화1.pptx
+++ b/dist/weeks-포트폴리오제작/포트폴리오제작_06주차_콘텐츠구조화1.pptx
@@ -2422,7 +2422,7 @@
                 <a:ea typeface="Pretendard" pitchFamily="34" charset="-122"/>
                 <a:cs typeface="Pretendard" pitchFamily="34" charset="-120"/>
               </a:rPr>
-              <a:t>90분 — 강의 20분 · 실습 50분 · 중간 점검 20분</a:t>
+              <a:t>120분 — 강의 20분 · 실습 70분 · 중간 점검 20분</a:t>
             </a:r>
             <a:endParaRPr lang="en-US" sz="1200" dirty="0"/>
           </a:p>
@@ -4023,7 +4023,7 @@
                 <a:ea typeface="Pretendard" pitchFamily="34" charset="-122"/>
                 <a:cs typeface="Pretendard" pitchFamily="34" charset="-120"/>
               </a:rPr>
-              <a:t>50분 · 개인 — 대표 프로젝트 하나만 합니다.</a:t>
+              <a:t>70분 · 개인 — 대표 프로젝트 하나만 합니다. 중간에 휴식이 한 번 들어갑니다.</a:t>
             </a:r>
             <a:endParaRPr lang="en-US" sz="1150" dirty="0"/>
           </a:p>
@@ -4087,7 +4087,7 @@
                 <a:ea typeface="Pretendard Light" pitchFamily="34" charset="-122"/>
                 <a:cs typeface="Pretendard Light" pitchFamily="34" charset="-120"/>
               </a:rPr>
-              <a:t>10분</a:t>
+              <a:t>14분</a:t>
             </a:r>
             <a:endParaRPr lang="en-US" sz="2200" dirty="0"/>
           </a:p>
@@ -4232,7 +4232,7 @@
                 <a:ea typeface="Pretendard Light" pitchFamily="34" charset="-122"/>
                 <a:cs typeface="Pretendard Light" pitchFamily="34" charset="-120"/>
               </a:rPr>
-              <a:t>10분</a:t>
+              <a:t>14분</a:t>
             </a:r>
             <a:endParaRPr lang="en-US" sz="2200" dirty="0"/>
           </a:p>
@@ -4377,7 +4377,7 @@
                 <a:ea typeface="Pretendard Light" pitchFamily="34" charset="-122"/>
                 <a:cs typeface="Pretendard Light" pitchFamily="34" charset="-120"/>
               </a:rPr>
-              <a:t>20분</a:t>
+              <a:t>28분</a:t>
             </a:r>
             <a:endParaRPr lang="en-US" sz="2200" dirty="0"/>
           </a:p>
@@ -4522,7 +4522,7 @@
                 <a:ea typeface="Pretendard Light" pitchFamily="34" charset="-122"/>
                 <a:cs typeface="Pretendard Light" pitchFamily="34" charset="-120"/>
               </a:rPr>
-              <a:t>10분</a:t>
+              <a:t>14분</a:t>
             </a:r>
             <a:endParaRPr lang="en-US" sz="2200" dirty="0"/>
           </a:p>
@@ -6150,7 +6150,7 @@
                 <a:ea typeface="Pretendard Black" pitchFamily="34" charset="-122"/>
                 <a:cs typeface="Pretendard Black" pitchFamily="34" charset="-120"/>
               </a:rPr>
-              <a:t>오늘의 90분</a:t>
+              <a:t>오늘의 120분</a:t>
             </a:r>
             <a:endParaRPr lang="en-US" sz="3000" dirty="0"/>
           </a:p>
@@ -6189,7 +6189,7 @@
                 <a:ea typeface="Pretendard" pitchFamily="34" charset="-122"/>
                 <a:cs typeface="Pretendard" pitchFamily="34" charset="-120"/>
               </a:rPr>
-              <a:t>강의 20분 · 실습 50분 · 중간 점검 20분</a:t>
+              <a:t>강의 20분 · 실습 70분 · 중간 점검 20분</a:t>
             </a:r>
             <a:endParaRPr lang="en-US" sz="1150" dirty="0"/>
           </a:p>
@@ -6229,7 +6229,7 @@
         <p:spPr>
           <a:xfrm>
             <a:off x="640080" y="1719072"/>
-            <a:ext cx="1600200" cy="932688"/>
+            <a:ext cx="1600200" cy="830275"/>
           </a:xfrm>
           <a:prstGeom prst="rect">
             <a:avLst/>
@@ -6268,7 +6268,7 @@
         <p:spPr>
           <a:xfrm>
             <a:off x="2377440" y="1719072"/>
-            <a:ext cx="6888175" cy="932688"/>
+            <a:ext cx="6888175" cy="830275"/>
           </a:xfrm>
           <a:prstGeom prst="rect">
             <a:avLst/>
@@ -6307,7 +6307,7 @@
         <p:spPr>
           <a:xfrm>
             <a:off x="9265615" y="1719072"/>
-            <a:ext cx="2286000" cy="932688"/>
+            <a:ext cx="2286000" cy="830275"/>
           </a:xfrm>
           <a:prstGeom prst="rect">
             <a:avLst/>
@@ -6345,7 +6345,7 @@
         </p:nvSpPr>
         <p:spPr>
           <a:xfrm>
-            <a:off x="640080" y="2633472"/>
+            <a:off x="640080" y="2531059"/>
             <a:ext cx="10911535" cy="7315"/>
           </a:xfrm>
           <a:prstGeom prst="rect">
@@ -6370,8 +6370,8 @@
         </p:nvSpPr>
         <p:spPr>
           <a:xfrm>
-            <a:off x="640080" y="2651760"/>
-            <a:ext cx="1600200" cy="932688"/>
+            <a:off x="640080" y="2549347"/>
+            <a:ext cx="1600200" cy="830275"/>
           </a:xfrm>
           <a:prstGeom prst="rect">
             <a:avLst/>
@@ -6395,7 +6395,7 @@
                 <a:ea typeface="Pretendard" pitchFamily="34" charset="-122"/>
                 <a:cs typeface="Pretendard" pitchFamily="34" charset="-120"/>
               </a:rPr>
-              <a:t>00:20–01:10</a:t>
+              <a:t>00:20–01:05</a:t>
             </a:r>
             <a:endParaRPr lang="en-US" sz="1050" dirty="0"/>
           </a:p>
@@ -6409,8 +6409,8 @@
         </p:nvSpPr>
         <p:spPr>
           <a:xfrm>
-            <a:off x="2377440" y="2651760"/>
-            <a:ext cx="6888175" cy="932688"/>
+            <a:off x="2377440" y="2549347"/>
+            <a:ext cx="6888175" cy="830275"/>
           </a:xfrm>
           <a:prstGeom prst="rect">
             <a:avLst/>
@@ -6434,7 +6434,7 @@
                 <a:ea typeface="Pretendard" pitchFamily="34" charset="-122"/>
                 <a:cs typeface="Pretendard" pitchFamily="34" charset="-120"/>
               </a:rPr>
-              <a:t>리서치 자료 시각화 실습</a:t>
+              <a:t>실습 — 리서치 정리 페이지 (1)</a:t>
             </a:r>
             <a:endParaRPr lang="en-US" sz="1300" dirty="0"/>
           </a:p>
@@ -6448,8 +6448,8 @@
         </p:nvSpPr>
         <p:spPr>
           <a:xfrm>
-            <a:off x="9265615" y="2651760"/>
-            <a:ext cx="2286000" cy="932688"/>
+            <a:off x="9265615" y="2549347"/>
+            <a:ext cx="2286000" cy="830275"/>
           </a:xfrm>
           <a:prstGeom prst="rect">
             <a:avLst/>
@@ -6473,7 +6473,7 @@
                 <a:ea typeface="Pretendard" pitchFamily="34" charset="-122"/>
                 <a:cs typeface="Pretendard" pitchFamily="34" charset="-120"/>
               </a:rPr>
-              <a:t>개인 워크 + 순회</a:t>
+              <a:t>개인 워크</a:t>
             </a:r>
             <a:endParaRPr lang="en-US" sz="1050" dirty="0"/>
           </a:p>
@@ -6487,7 +6487,7 @@
         </p:nvSpPr>
         <p:spPr>
           <a:xfrm>
-            <a:off x="640080" y="3566160"/>
+            <a:off x="640080" y="3361334"/>
             <a:ext cx="10911535" cy="7315"/>
           </a:xfrm>
           <a:prstGeom prst="rect">
@@ -6512,8 +6512,111 @@
         </p:nvSpPr>
         <p:spPr>
           <a:xfrm>
-            <a:off x="640080" y="3584448"/>
-            <a:ext cx="1600200" cy="932688"/>
+            <a:off x="640080" y="3379622"/>
+            <a:ext cx="1600200" cy="830275"/>
+          </a:xfrm>
+          <a:prstGeom prst="rect">
+            <a:avLst/>
+          </a:prstGeom>
+          <a:noFill/>
+          <a:ln/>
+        </p:spPr>
+        <p:txBody>
+          <a:bodyPr wrap="square" lIns="0" tIns="0" rIns="0" bIns="0" rtlCol="0" anchor="ctr"/>
+          <a:lstStyle/>
+          <a:p>
+            <a:pPr indent="0" marL="0">
+              <a:buNone/>
+            </a:pPr>
+            <a:r>
+              <a:rPr lang="en-US" sz="1050" spc="60" kern="0" dirty="0">
+                <a:solidFill>
+                  <a:srgbClr val="9B9B9B"/>
+                </a:solidFill>
+                <a:latin typeface="Pretendard" pitchFamily="34" charset="0"/>
+                <a:ea typeface="Pretendard" pitchFamily="34" charset="-122"/>
+                <a:cs typeface="Pretendard" pitchFamily="34" charset="-120"/>
+              </a:rPr>
+              <a:t>01:05–01:15</a:t>
+            </a:r>
+            <a:endParaRPr lang="en-US" sz="1050" dirty="0"/>
+          </a:p>
+        </p:txBody>
+      </p:sp>
+      <p:sp>
+        <p:nvSpPr>
+          <p:cNvPr id="19" name="Text 17"/>
+          <p:cNvSpPr/>
+          <p:nvPr/>
+        </p:nvSpPr>
+        <p:spPr>
+          <a:xfrm>
+            <a:off x="2377440" y="3379622"/>
+            <a:ext cx="6888175" cy="830275"/>
+          </a:xfrm>
+          <a:prstGeom prst="rect">
+            <a:avLst/>
+          </a:prstGeom>
+          <a:noFill/>
+          <a:ln/>
+        </p:spPr>
+        <p:txBody>
+          <a:bodyPr wrap="square" lIns="0" tIns="0" rIns="0" bIns="0" rtlCol="0" anchor="ctr"/>
+          <a:lstStyle/>
+          <a:p>
+            <a:pPr indent="0" marL="0">
+              <a:buNone/>
+            </a:pPr>
+            <a:r>
+              <a:rPr lang="en-US" sz="1100" dirty="0">
+                <a:solidFill>
+                  <a:srgbClr val="9B9B9B"/>
+                </a:solidFill>
+                <a:latin typeface="Pretendard" pitchFamily="34" charset="0"/>
+                <a:ea typeface="Pretendard" pitchFamily="34" charset="-122"/>
+                <a:cs typeface="Pretendard" pitchFamily="34" charset="-120"/>
+              </a:rPr>
+              <a:t>휴식</a:t>
+            </a:r>
+            <a:endParaRPr lang="en-US" sz="1100" dirty="0"/>
+          </a:p>
+        </p:txBody>
+      </p:sp>
+      <p:sp>
+        <p:nvSpPr>
+          <p:cNvPr id="20" name="Shape 18"/>
+          <p:cNvSpPr/>
+          <p:nvPr/>
+        </p:nvSpPr>
+        <p:spPr>
+          <a:xfrm>
+            <a:off x="640080" y="4191610"/>
+            <a:ext cx="10911535" cy="7315"/>
+          </a:xfrm>
+          <a:prstGeom prst="rect">
+            <a:avLst/>
+          </a:prstGeom>
+          <a:solidFill>
+            <a:srgbClr val="EFEFEF"/>
+          </a:solidFill>
+          <a:ln w="12700">
+            <a:solidFill>
+              <a:srgbClr val="EFEFEF"/>
+            </a:solidFill>
+            <a:prstDash val="solid"/>
+          </a:ln>
+        </p:spPr>
+      </p:sp>
+      <p:sp>
+        <p:nvSpPr>
+          <p:cNvPr id="21" name="Text 19"/>
+          <p:cNvSpPr/>
+          <p:nvPr/>
+        </p:nvSpPr>
+        <p:spPr>
+          <a:xfrm>
+            <a:off x="640080" y="4209898"/>
+            <a:ext cx="1600200" cy="830275"/>
           </a:xfrm>
           <a:prstGeom prst="rect">
             <a:avLst/>
@@ -6537,7 +6640,7 @@
                 <a:ea typeface="Pretendard" pitchFamily="34" charset="-122"/>
                 <a:cs typeface="Pretendard" pitchFamily="34" charset="-120"/>
               </a:rPr>
-              <a:t>01:10–01:30</a:t>
+              <a:t>01:15–01:40</a:t>
             </a:r>
             <a:endParaRPr lang="en-US" sz="1050" dirty="0"/>
           </a:p>
@@ -6545,14 +6648,14 @@
       </p:sp>
       <p:sp>
         <p:nvSpPr>
-          <p:cNvPr id="19" name="Text 17"/>
-          <p:cNvSpPr/>
-          <p:nvPr/>
-        </p:nvSpPr>
-        <p:spPr>
-          <a:xfrm>
-            <a:off x="2377440" y="3584448"/>
-            <a:ext cx="6888175" cy="932688"/>
+          <p:cNvPr id="22" name="Text 20"/>
+          <p:cNvSpPr/>
+          <p:nvPr/>
+        </p:nvSpPr>
+        <p:spPr>
+          <a:xfrm>
+            <a:off x="2377440" y="4209898"/>
+            <a:ext cx="6888175" cy="830275"/>
           </a:xfrm>
           <a:prstGeom prst="rect">
             <a:avLst/>
@@ -6576,6 +6679,148 @@
                 <a:ea typeface="Pretendard" pitchFamily="34" charset="-122"/>
                 <a:cs typeface="Pretendard" pitchFamily="34" charset="-120"/>
               </a:rPr>
+              <a:t>실습 — 리서치 정리 페이지 (2)</a:t>
+            </a:r>
+            <a:endParaRPr lang="en-US" sz="1300" dirty="0"/>
+          </a:p>
+        </p:txBody>
+      </p:sp>
+      <p:sp>
+        <p:nvSpPr>
+          <p:cNvPr id="23" name="Text 21"/>
+          <p:cNvSpPr/>
+          <p:nvPr/>
+        </p:nvSpPr>
+        <p:spPr>
+          <a:xfrm>
+            <a:off x="9265615" y="4209898"/>
+            <a:ext cx="2286000" cy="830275"/>
+          </a:xfrm>
+          <a:prstGeom prst="rect">
+            <a:avLst/>
+          </a:prstGeom>
+          <a:noFill/>
+          <a:ln/>
+        </p:spPr>
+        <p:txBody>
+          <a:bodyPr wrap="square" lIns="0" tIns="0" rIns="0" bIns="0" rtlCol="0" anchor="ctr"/>
+          <a:lstStyle/>
+          <a:p>
+            <a:pPr algn="r" indent="0" marL="0">
+              <a:buNone/>
+            </a:pPr>
+            <a:r>
+              <a:rPr lang="en-US" sz="1050" dirty="0">
+                <a:solidFill>
+                  <a:srgbClr val="6E6E6E"/>
+                </a:solidFill>
+                <a:latin typeface="Pretendard" pitchFamily="34" charset="0"/>
+                <a:ea typeface="Pretendard" pitchFamily="34" charset="-122"/>
+                <a:cs typeface="Pretendard" pitchFamily="34" charset="-120"/>
+              </a:rPr>
+              <a:t>개인 워크 + 순회</a:t>
+            </a:r>
+            <a:endParaRPr lang="en-US" sz="1050" dirty="0"/>
+          </a:p>
+        </p:txBody>
+      </p:sp>
+      <p:sp>
+        <p:nvSpPr>
+          <p:cNvPr id="24" name="Shape 22"/>
+          <p:cNvSpPr/>
+          <p:nvPr/>
+        </p:nvSpPr>
+        <p:spPr>
+          <a:xfrm>
+            <a:off x="640080" y="5021885"/>
+            <a:ext cx="10911535" cy="7315"/>
+          </a:xfrm>
+          <a:prstGeom prst="rect">
+            <a:avLst/>
+          </a:prstGeom>
+          <a:solidFill>
+            <a:srgbClr val="DCDCDC"/>
+          </a:solidFill>
+          <a:ln w="12700">
+            <a:solidFill>
+              <a:srgbClr val="DCDCDC"/>
+            </a:solidFill>
+            <a:prstDash val="solid"/>
+          </a:ln>
+        </p:spPr>
+      </p:sp>
+      <p:sp>
+        <p:nvSpPr>
+          <p:cNvPr id="25" name="Text 23"/>
+          <p:cNvSpPr/>
+          <p:nvPr/>
+        </p:nvSpPr>
+        <p:spPr>
+          <a:xfrm>
+            <a:off x="640080" y="5040173"/>
+            <a:ext cx="1600200" cy="830275"/>
+          </a:xfrm>
+          <a:prstGeom prst="rect">
+            <a:avLst/>
+          </a:prstGeom>
+          <a:noFill/>
+          <a:ln/>
+        </p:spPr>
+        <p:txBody>
+          <a:bodyPr wrap="square" lIns="0" tIns="0" rIns="0" bIns="0" rtlCol="0" anchor="ctr"/>
+          <a:lstStyle/>
+          <a:p>
+            <a:pPr indent="0" marL="0">
+              <a:buNone/>
+            </a:pPr>
+            <a:r>
+              <a:rPr lang="en-US" sz="1050" b="1" spc="60" kern="0" dirty="0">
+                <a:solidFill>
+                  <a:srgbClr val="111111"/>
+                </a:solidFill>
+                <a:latin typeface="Pretendard" pitchFamily="34" charset="0"/>
+                <a:ea typeface="Pretendard" pitchFamily="34" charset="-122"/>
+                <a:cs typeface="Pretendard" pitchFamily="34" charset="-120"/>
+              </a:rPr>
+              <a:t>01:40–02:00</a:t>
+            </a:r>
+            <a:endParaRPr lang="en-US" sz="1050" dirty="0"/>
+          </a:p>
+        </p:txBody>
+      </p:sp>
+      <p:sp>
+        <p:nvSpPr>
+          <p:cNvPr id="26" name="Text 24"/>
+          <p:cNvSpPr/>
+          <p:nvPr/>
+        </p:nvSpPr>
+        <p:spPr>
+          <a:xfrm>
+            <a:off x="2377440" y="5040173"/>
+            <a:ext cx="6888175" cy="830275"/>
+          </a:xfrm>
+          <a:prstGeom prst="rect">
+            <a:avLst/>
+          </a:prstGeom>
+          <a:noFill/>
+          <a:ln/>
+        </p:spPr>
+        <p:txBody>
+          <a:bodyPr wrap="square" lIns="0" tIns="0" rIns="0" bIns="0" rtlCol="0" anchor="ctr"/>
+          <a:lstStyle/>
+          <a:p>
+            <a:pPr indent="0" marL="0">
+              <a:buNone/>
+            </a:pPr>
+            <a:r>
+              <a:rPr lang="en-US" sz="1300" b="1" dirty="0">
+                <a:solidFill>
+                  <a:srgbClr val="111111"/>
+                </a:solidFill>
+                <a:latin typeface="Pretendard" pitchFamily="34" charset="0"/>
+                <a:ea typeface="Pretendard" pitchFamily="34" charset="-122"/>
+                <a:cs typeface="Pretendard" pitchFamily="34" charset="-120"/>
+              </a:rPr>
               <a:t>중간 점검</a:t>
             </a:r>
             <a:endParaRPr lang="en-US" sz="1300" dirty="0"/>
@@ -6584,14 +6829,14 @@
       </p:sp>
       <p:sp>
         <p:nvSpPr>
-          <p:cNvPr id="20" name="Text 18"/>
-          <p:cNvSpPr/>
-          <p:nvPr/>
-        </p:nvSpPr>
-        <p:spPr>
-          <a:xfrm>
-            <a:off x="9265615" y="3584448"/>
-            <a:ext cx="2286000" cy="932688"/>
+          <p:cNvPr id="27" name="Text 25"/>
+          <p:cNvSpPr/>
+          <p:nvPr/>
+        </p:nvSpPr>
+        <p:spPr>
+          <a:xfrm>
+            <a:off x="9265615" y="5040173"/>
+            <a:ext cx="2286000" cy="830275"/>
           </a:xfrm>
           <a:prstGeom prst="rect">
             <a:avLst/>
@@ -6623,14 +6868,14 @@
       </p:sp>
       <p:sp>
         <p:nvSpPr>
-          <p:cNvPr id="21" name="Shape 19"/>
-          <p:cNvSpPr/>
-          <p:nvPr/>
-        </p:nvSpPr>
-        <p:spPr>
-          <a:xfrm>
-            <a:off x="640080" y="4828032"/>
-            <a:ext cx="10911535" cy="969264"/>
+          <p:cNvPr id="28" name="Shape 26"/>
+          <p:cNvSpPr/>
+          <p:nvPr/>
+        </p:nvSpPr>
+        <p:spPr>
+          <a:xfrm>
+            <a:off x="640080" y="5852160"/>
+            <a:ext cx="10911535" cy="7315"/>
           </a:xfrm>
           <a:prstGeom prst="rect">
             <a:avLst/>
@@ -6648,88 +6893,7 @@
       </p:sp>
       <p:sp>
         <p:nvSpPr>
-          <p:cNvPr id="22" name="Text 20"/>
-          <p:cNvSpPr/>
-          <p:nvPr/>
-        </p:nvSpPr>
-        <p:spPr>
-          <a:xfrm>
-            <a:off x="1097280" y="5010912"/>
-            <a:ext cx="2743200" cy="256032"/>
-          </a:xfrm>
-          <a:prstGeom prst="rect">
-            <a:avLst/>
-          </a:prstGeom>
-          <a:noFill/>
-          <a:ln/>
-        </p:spPr>
-        <p:txBody>
-          <a:bodyPr wrap="square" lIns="0" tIns="0" rIns="0" bIns="0" rtlCol="0" anchor="ctr"/>
-          <a:lstStyle/>
-          <a:p>
-            <a:pPr indent="0" marL="0">
-              <a:buNone/>
-            </a:pPr>
-            <a:r>
-              <a:rPr lang="en-US" sz="950" spc="240" kern="0" dirty="0">
-                <a:solidFill>
-                  <a:srgbClr val="9A9A9A"/>
-                </a:solidFill>
-                <a:latin typeface="Pretendard" pitchFamily="34" charset="0"/>
-                <a:ea typeface="Pretendard" pitchFamily="34" charset="-122"/>
-                <a:cs typeface="Pretendard" pitchFamily="34" charset="-120"/>
-              </a:rPr>
-              <a:t>오늘 끝나면</a:t>
-            </a:r>
-            <a:endParaRPr lang="en-US" sz="950" dirty="0"/>
-          </a:p>
-        </p:txBody>
-      </p:sp>
-      <p:sp>
-        <p:nvSpPr>
-          <p:cNvPr id="23" name="Text 21"/>
-          <p:cNvSpPr/>
-          <p:nvPr/>
-        </p:nvSpPr>
-        <p:spPr>
-          <a:xfrm>
-            <a:off x="1097280" y="5285232"/>
-            <a:ext cx="9997135" cy="365760"/>
-          </a:xfrm>
-          <a:prstGeom prst="rect">
-            <a:avLst/>
-          </a:prstGeom>
-          <a:noFill/>
-          <a:ln/>
-        </p:spPr>
-        <p:txBody>
-          <a:bodyPr wrap="square" lIns="0" tIns="0" rIns="0" bIns="0" rtlCol="0" anchor="ctr"/>
-          <a:lstStyle/>
-          <a:p>
-            <a:pPr indent="0" marL="0">
-              <a:lnSpc>
-                <a:spcPct val="126000"/>
-              </a:lnSpc>
-              <a:buNone/>
-            </a:pPr>
-            <a:r>
-              <a:rPr lang="en-US" sz="1600" dirty="0">
-                <a:solidFill>
-                  <a:srgbClr val="FFFFFF"/>
-                </a:solidFill>
-                <a:latin typeface="Pretendard Black" pitchFamily="34" charset="0"/>
-                <a:ea typeface="Pretendard Black" pitchFamily="34" charset="-122"/>
-                <a:cs typeface="Pretendard Black" pitchFamily="34" charset="-120"/>
-              </a:rPr>
-              <a:t>대표 프로젝트 하나의 문제 문장이 확정되고, 리서치 정리 페이지 한 장이 나옵니다.</a:t>
-            </a:r>
-            <a:endParaRPr lang="en-US" sz="1600" dirty="0"/>
-          </a:p>
-        </p:txBody>
-      </p:sp>
-      <p:sp>
-        <p:nvSpPr>
-          <p:cNvPr id="24" name="Shape 22"/>
+          <p:cNvPr id="29" name="Shape 27"/>
           <p:cNvSpPr/>
           <p:nvPr/>
         </p:nvSpPr>
@@ -6754,7 +6918,7 @@
       </p:sp>
       <p:sp>
         <p:nvSpPr>
-          <p:cNvPr id="25" name="Text 23"/>
+          <p:cNvPr id="30" name="Text 28"/>
           <p:cNvSpPr/>
           <p:nvPr/>
         </p:nvSpPr>
@@ -6793,7 +6957,7 @@
       </p:sp>
       <p:sp>
         <p:nvSpPr>
-          <p:cNvPr id="26" name="Text 24"/>
+          <p:cNvPr id="31" name="Text 29"/>
           <p:cNvSpPr/>
           <p:nvPr/>
         </p:nvSpPr>

--- a/dist/weeks-포트폴리오제작/포트폴리오제작_06주차_콘텐츠구조화1.pptx
+++ b/dist/weeks-포트폴리오제작/포트폴리오제작_06주차_콘텐츠구조화1.pptx
@@ -513,7 +513,8 @@
           <a:p>
             <a:r>
               <a:rPr lang="en-US" dirty="0"/>
-              <a:t>PART II의 첫 주다. 여기서부터 실제 지면이 나오기 시작한다. 자료를 안 가져온 학생은 오늘 만들 것이 없으므로 시작 전에 확인할 것.</a:t>
+              <a:t>[운영 메모]
+PART II의 첫 주다. 여기서부터 실제 지면이 나오기 시작한다. 자료를 안 가져온 학생은 오늘 만들 것이 없으므로 시작 전에 확인할 것.</a:t>
             </a:r>
             <a:endParaRPr lang="en-US" dirty="0"/>
           </a:p>
@@ -601,7 +602,8 @@
           <a:p>
             <a:r>
               <a:rPr lang="en-US" dirty="0"/>
-              <a:t>축소해서 보기는 그 자리에서 시연할 수 있다. Figma 줌아웃으로 바로 확인시킬 것.</a:t>
+              <a:t>[운영 메모]
+축소해서 보기는 그 자리에서 시연할 수 있다. Figma 줌아웃으로 바로 확인시킬 것.</a:t>
             </a:r>
             <a:endParaRPr lang="en-US" dirty="0"/>
           </a:p>
@@ -689,7 +691,8 @@
           <a:p>
             <a:r>
               <a:rPr lang="en-US" dirty="0"/>
-              <a:t>마지막 축소 확인이 이 실습의 검증 장치다. 반드시 시킬 것.</a:t>
+              <a:t>[운영 메모]
+마지막 축소 확인이 이 실습의 검증 장치다. 반드시 시킬 것.</a:t>
             </a:r>
             <a:endParaRPr lang="en-US" dirty="0"/>
           </a:p>
@@ -777,7 +780,8 @@
           <a:p>
             <a:r>
               <a:rPr lang="en-US" dirty="0"/>
-              <a:t>문제 문장을 전 프로젝트에 대해 미리 받아두면 7주차 이후 속도가 빨라진다.</a:t>
+              <a:t>[운영 메모]
+문제 문장을 전 프로젝트에 대해 미리 받아두면 7주차 이후 속도가 빨라진다.</a:t>
             </a:r>
             <a:endParaRPr lang="en-US" dirty="0"/>
           </a:p>
@@ -865,7 +869,8 @@
           <a:p>
             <a:r>
               <a:rPr lang="en-US" dirty="0"/>
-              <a:t>실습 50분은 짧다. Figma 템플릿을 미리 배포해 두면 빈 화면에서 시작하는 시간을 아낄 수 있다.</a:t>
+              <a:t>[운영 메모]
+실습 50분은 짧다. Figma 템플릿을 미리 배포해 두면 빈 화면에서 시작하는 시간을 아낄 수 있다.</a:t>
             </a:r>
             <a:endParaRPr lang="en-US" dirty="0"/>
           </a:p>
@@ -953,7 +958,8 @@
           <a:p>
             <a:r>
               <a:rPr lang="en-US" dirty="0"/>
-              <a:t>2번이 핵심. 리서치 페이지가 자료 더미가 되는 것을 막는다.</a:t>
+              <a:t>[운영 메모]
+2번이 핵심. 리서치 페이지가 자료 더미가 되는 것을 막는다.</a:t>
             </a:r>
             <a:endParaRPr lang="en-US" dirty="0"/>
           </a:p>
@@ -1041,7 +1047,8 @@
           <a:p>
             <a:r>
               <a:rPr lang="en-US" dirty="0"/>
-              <a:t>예시를 즉석에서 고쳐 보이는 것이 설명보다 빠르다.</a:t>
+              <a:t>[운영 메모]
+예시를 즉석에서 고쳐 보이는 것이 설명보다 빠르다.</a:t>
             </a:r>
             <a:endParaRPr lang="en-US" dirty="0"/>
           </a:p>
@@ -1129,7 +1136,8 @@
           <a:p>
             <a:r>
               <a:rPr lang="en-US" dirty="0"/>
-              <a:t>학생 대부분이 과제 조건을 그대로 적어온다. 이 대비를 확실히 보여줄 것.</a:t>
+              <a:t>[운영 메모]
+학생 대부분이 과제 조건을 그대로 적어온다. 이 대비를 확실히 보여줄 것.</a:t>
             </a:r>
             <a:endParaRPr lang="en-US" dirty="0"/>
           </a:p>
@@ -1217,7 +1225,8 @@
           <a:p>
             <a:r>
               <a:rPr lang="en-US" dirty="0"/>
-              <a:t>04를 특히 강조. 학생들이 조건을 다 넣으려다 문장을 길게 만든다.</a:t>
+              <a:t>[운영 메모]
+04를 특히 강조. 학생들이 조건을 다 넣으려다 문장을 길게 만든다.</a:t>
             </a:r>
             <a:endParaRPr lang="en-US" dirty="0"/>
           </a:p>
@@ -1305,7 +1314,8 @@
           <a:p>
             <a:r>
               <a:rPr lang="en-US" dirty="0"/>
-              <a:t>오른쪽이 '제목'이라는 점을 짚을 것. 제목과 문제 문장은 다르다.</a:t>
+              <a:t>[운영 메모]
+오른쪽이 '제목'이라는 점을 짚을 것. 제목과 문제 문장은 다르다.</a:t>
             </a:r>
             <a:endParaRPr lang="en-US" dirty="0"/>
           </a:p>
@@ -1393,7 +1403,8 @@
           <a:p>
             <a:r>
               <a:rPr lang="en-US" dirty="0"/>
-              <a:t>Figma·Miro 템플릿을 화면에 띄우고 시연.</a:t>
+              <a:t>[운영 메모]
+Figma·Miro 템플릿을 화면에 띄우고 시연.</a:t>
             </a:r>
             <a:endParaRPr lang="en-US" dirty="0"/>
           </a:p>
@@ -1481,7 +1492,8 @@
           <a:p>
             <a:r>
               <a:rPr lang="en-US" dirty="0"/>
-              <a:t>'조사 과정을 크게, 발견을 작게' 만드는 것이 가장 흔한 실수다.</a:t>
+              <a:t>[운영 메모]
+'조사 과정을 크게, 발견을 작게' 만드는 것이 가장 흔한 실수다.</a:t>
             </a:r>
             <a:endParaRPr lang="en-US" dirty="0"/>
           </a:p>
